--- a/submission/group_9_final/TB-Project-Presentation.pptx
+++ b/submission/group_9_final/TB-Project-Presentation.pptx
@@ -991,7 +991,7 @@
   <p:cSld>
     <p:spTree>
       <p:nvGrpSpPr>
-        <p:cNvPr id="65" name="Shape 65"/>
+        <p:cNvPr id="71" name="Shape 71"/>
         <p:cNvGrpSpPr/>
         <p:nvPr/>
       </p:nvGrpSpPr>
@@ -1005,7 +1005,7 @@
       </p:grpSpPr>
       <p:sp>
         <p:nvSpPr>
-          <p:cNvPr id="66" name="Google Shape;66;g3e0b7d11ec8_0_4:notes"/>
+          <p:cNvPr id="72" name="Google Shape;72;g3e0b7d11ec8_0_4:notes"/>
           <p:cNvSpPr/>
           <p:nvPr>
             <p:ph idx="2" type="sldImg"/>
@@ -1040,7 +1040,7 @@
       </p:sp>
       <p:sp>
         <p:nvSpPr>
-          <p:cNvPr id="67" name="Google Shape;67;g3e0b7d11ec8_0_4:notes"/>
+          <p:cNvPr id="73" name="Google Shape;73;g3e0b7d11ec8_0_4:notes"/>
           <p:cNvSpPr txBox="1"/>
           <p:nvPr>
             <p:ph idx="1" type="body"/>
@@ -5859,7 +5859,7 @@
       </p:grpSpPr>
       <p:pic>
         <p:nvPicPr>
-          <p:cNvPr id="64" name="Google Shape;64;p15" title="slide_3_methods_flow.png"/>
+          <p:cNvPr id="64" name="Google Shape;64;p15"/>
           <p:cNvPicPr preferRelativeResize="0"/>
           <p:nvPr/>
         </p:nvPicPr>
@@ -5873,8 +5873,169 @@
         </p:blipFill>
         <p:spPr>
           <a:xfrm>
-            <a:off x="152400" y="152400"/>
-            <a:ext cx="8528102" cy="4838699"/>
+            <a:off x="0" y="152400"/>
+            <a:ext cx="8633247" cy="4991099"/>
+          </a:xfrm>
+          <a:prstGeom prst="rect">
+            <a:avLst/>
+          </a:prstGeom>
+          <a:noFill/>
+          <a:ln>
+            <a:noFill/>
+          </a:ln>
+        </p:spPr>
+      </p:pic>
+      <p:pic>
+        <p:nvPicPr>
+          <p:cNvPr id="65" name="Google Shape;65;p15"/>
+          <p:cNvPicPr preferRelativeResize="0"/>
+          <p:nvPr/>
+        </p:nvPicPr>
+        <p:blipFill rotWithShape="1">
+          <a:blip r:embed="rId4">
+            <a:alphaModFix/>
+          </a:blip>
+          <a:srcRect b="0" l="3153" r="58253" t="0"/>
+          <a:stretch/>
+        </p:blipFill>
+        <p:spPr>
+          <a:xfrm>
+            <a:off x="2688100" y="-25"/>
+            <a:ext cx="1644649" cy="1550150"/>
+          </a:xfrm>
+          <a:prstGeom prst="rect">
+            <a:avLst/>
+          </a:prstGeom>
+          <a:noFill/>
+          <a:ln>
+            <a:noFill/>
+          </a:ln>
+        </p:spPr>
+      </p:pic>
+      <p:cxnSp>
+        <p:nvCxnSpPr>
+          <p:cNvPr id="66" name="Google Shape;66;p15"/>
+          <p:cNvCxnSpPr/>
+          <p:nvPr/>
+        </p:nvCxnSpPr>
+        <p:spPr>
+          <a:xfrm flipH="1" rot="10800000">
+            <a:off x="4438388" y="665525"/>
+            <a:ext cx="1914000" cy="10800"/>
+          </a:xfrm>
+          <a:prstGeom prst="straightConnector1">
+            <a:avLst/>
+          </a:prstGeom>
+          <a:noFill/>
+          <a:ln cap="flat" cmpd="sng" w="76200">
+            <a:solidFill>
+              <a:srgbClr val="0000FF"/>
+            </a:solidFill>
+            <a:prstDash val="solid"/>
+            <a:round/>
+            <a:headEnd len="med" w="med" type="none"/>
+            <a:tailEnd len="med" w="med" type="triangle"/>
+          </a:ln>
+        </p:spPr>
+      </p:cxnSp>
+      <p:pic>
+        <p:nvPicPr>
+          <p:cNvPr id="67" name="Google Shape;67;p15"/>
+          <p:cNvPicPr preferRelativeResize="0"/>
+          <p:nvPr/>
+        </p:nvPicPr>
+        <p:blipFill rotWithShape="1">
+          <a:blip r:embed="rId4">
+            <a:alphaModFix/>
+          </a:blip>
+          <a:srcRect b="0" l="3153" r="91747" t="85855"/>
+          <a:stretch/>
+        </p:blipFill>
+        <p:spPr>
+          <a:xfrm>
+            <a:off x="3087875" y="-25"/>
+            <a:ext cx="209175" cy="152425"/>
+          </a:xfrm>
+          <a:prstGeom prst="rect">
+            <a:avLst/>
+          </a:prstGeom>
+          <a:noFill/>
+          <a:ln>
+            <a:noFill/>
+          </a:ln>
+        </p:spPr>
+      </p:pic>
+      <p:pic>
+        <p:nvPicPr>
+          <p:cNvPr id="68" name="Google Shape;68;p15"/>
+          <p:cNvPicPr preferRelativeResize="0"/>
+          <p:nvPr/>
+        </p:nvPicPr>
+        <p:blipFill rotWithShape="1">
+          <a:blip r:embed="rId5">
+            <a:alphaModFix/>
+          </a:blip>
+          <a:srcRect b="8567" l="15917" r="0" t="0"/>
+          <a:stretch/>
+        </p:blipFill>
+        <p:spPr>
+          <a:xfrm>
+            <a:off x="6885550" y="0"/>
+            <a:ext cx="2258450" cy="1550150"/>
+          </a:xfrm>
+          <a:prstGeom prst="rect">
+            <a:avLst/>
+          </a:prstGeom>
+          <a:noFill/>
+          <a:ln>
+            <a:noFill/>
+          </a:ln>
+        </p:spPr>
+      </p:pic>
+      <p:pic>
+        <p:nvPicPr>
+          <p:cNvPr id="69" name="Google Shape;69;p15"/>
+          <p:cNvPicPr preferRelativeResize="0"/>
+          <p:nvPr/>
+        </p:nvPicPr>
+        <p:blipFill rotWithShape="1">
+          <a:blip r:embed="rId5">
+            <a:alphaModFix/>
+          </a:blip>
+          <a:srcRect b="20849" l="0" r="0" t="0"/>
+          <a:stretch/>
+        </p:blipFill>
+        <p:spPr>
+          <a:xfrm>
+            <a:off x="6458025" y="-25"/>
+            <a:ext cx="2685975" cy="1341900"/>
+          </a:xfrm>
+          <a:prstGeom prst="rect">
+            <a:avLst/>
+          </a:prstGeom>
+          <a:noFill/>
+          <a:ln>
+            <a:noFill/>
+          </a:ln>
+        </p:spPr>
+      </p:pic>
+      <p:pic>
+        <p:nvPicPr>
+          <p:cNvPr id="70" name="Google Shape;70;p15"/>
+          <p:cNvPicPr preferRelativeResize="0"/>
+          <p:nvPr/>
+        </p:nvPicPr>
+        <p:blipFill rotWithShape="1">
+          <a:blip r:embed="rId5">
+            <a:alphaModFix/>
+          </a:blip>
+          <a:srcRect b="0" l="17939" r="0" t="0"/>
+          <a:stretch/>
+        </p:blipFill>
+        <p:spPr>
+          <a:xfrm>
+            <a:off x="6939925" y="-25"/>
+            <a:ext cx="2204100" cy="1695400"/>
           </a:xfrm>
           <a:prstGeom prst="rect">
             <a:avLst/>
@@ -5898,7 +6059,7 @@
   <p:cSld>
     <p:spTree>
       <p:nvGrpSpPr>
-        <p:cNvPr id="68" name="Shape 68"/>
+        <p:cNvPr id="74" name="Shape 74"/>
         <p:cNvGrpSpPr/>
         <p:nvPr/>
       </p:nvGrpSpPr>
@@ -5912,7 +6073,7 @@
       </p:grpSpPr>
       <p:pic>
         <p:nvPicPr>
-          <p:cNvPr id="69" name="Google Shape;69;p16" title="slide_4_rationale.png"/>
+          <p:cNvPr id="75" name="Google Shape;75;p16" title="slide_4_rationale.png"/>
           <p:cNvPicPr preferRelativeResize="0"/>
           <p:nvPr/>
         </p:nvPicPr>
@@ -5947,6 +6108,285 @@
 </file>
 
 <file path=ppt/theme/theme1.xml><?xml version="1.0" encoding="utf-8"?>
+<a:theme xmlns:a="http://schemas.openxmlformats.org/drawingml/2006/main" xmlns:r="http://schemas.openxmlformats.org/officeDocument/2006/relationships" name="Simple Light">
+  <a:themeElements>
+    <a:clrScheme name="Simple Light">
+      <a:dk1>
+        <a:srgbClr val="000000"/>
+      </a:dk1>
+      <a:lt1>
+        <a:srgbClr val="FFFFFF"/>
+      </a:lt1>
+      <a:dk2>
+        <a:srgbClr val="595959"/>
+      </a:dk2>
+      <a:lt2>
+        <a:srgbClr val="EEEEEE"/>
+      </a:lt2>
+      <a:accent1>
+        <a:srgbClr val="4285F4"/>
+      </a:accent1>
+      <a:accent2>
+        <a:srgbClr val="212121"/>
+      </a:accent2>
+      <a:accent3>
+        <a:srgbClr val="78909C"/>
+      </a:accent3>
+      <a:accent4>
+        <a:srgbClr val="FFAB40"/>
+      </a:accent4>
+      <a:accent5>
+        <a:srgbClr val="0097A7"/>
+      </a:accent5>
+      <a:accent6>
+        <a:srgbClr val="EEFF41"/>
+      </a:accent6>
+      <a:hlink>
+        <a:srgbClr val="0097A7"/>
+      </a:hlink>
+      <a:folHlink>
+        <a:srgbClr val="0097A7"/>
+      </a:folHlink>
+    </a:clrScheme>
+    <a:fontScheme name="Office">
+      <a:majorFont>
+        <a:latin typeface="Arial"/>
+        <a:ea typeface=""/>
+        <a:cs typeface=""/>
+        <a:font script="Jpan" typeface="ＭＳ Ｐゴシック"/>
+        <a:font script="Hang" typeface="맑은 고딕"/>
+        <a:font script="Hans" typeface="宋体"/>
+        <a:font script="Hant" typeface="新細明體"/>
+        <a:font script="Arab" typeface="Times New Roman"/>
+        <a:font script="Hebr" typeface="Times New Roman"/>
+        <a:font script="Thai" typeface="Angsana New"/>
+        <a:font script="Ethi" typeface="Nyala"/>
+        <a:font script="Beng" typeface="Vrinda"/>
+        <a:font script="Gujr" typeface="Shruti"/>
+        <a:font script="Khmr" typeface="MoolBoran"/>
+        <a:font script="Knda" typeface="Tunga"/>
+        <a:font script="Guru" typeface="Raavi"/>
+        <a:font script="Cans" typeface="Euphemia"/>
+        <a:font script="Cher" typeface="Plantagenet Cherokee"/>
+        <a:font script="Yiii" typeface="Microsoft Yi Baiti"/>
+        <a:font script="Tibt" typeface="Microsoft Himalaya"/>
+        <a:font script="Thaa" typeface="MV Boli"/>
+        <a:font script="Deva" typeface="Mangal"/>
+        <a:font script="Telu" typeface="Gautami"/>
+        <a:font script="Taml" typeface="Latha"/>
+        <a:font script="Syrc" typeface="Estrangelo Edessa"/>
+        <a:font script="Orya" typeface="Kalinga"/>
+        <a:font script="Mlym" typeface="Kartika"/>
+        <a:font script="Laoo" typeface="DokChampa"/>
+        <a:font script="Sinh" typeface="Iskoola Pota"/>
+        <a:font script="Mong" typeface="Mongolian Baiti"/>
+        <a:font script="Viet" typeface="Times New Roman"/>
+        <a:font script="Uigh" typeface="Microsoft Uighur"/>
+        <a:font script="Geor" typeface="Sylfaen"/>
+      </a:majorFont>
+      <a:minorFont>
+        <a:latin typeface="Arial"/>
+        <a:ea typeface=""/>
+        <a:cs typeface=""/>
+        <a:font script="Jpan" typeface="ＭＳ Ｐゴシック"/>
+        <a:font script="Hang" typeface="맑은 고딕"/>
+        <a:font script="Hans" typeface="宋体"/>
+        <a:font script="Hant" typeface="新細明體"/>
+        <a:font script="Arab" typeface="Arial"/>
+        <a:font script="Hebr" typeface="Arial"/>
+        <a:font script="Thai" typeface="Cordia New"/>
+        <a:font script="Ethi" typeface="Nyala"/>
+        <a:font script="Beng" typeface="Vrinda"/>
+        <a:font script="Gujr" typeface="Shruti"/>
+        <a:font script="Khmr" typeface="DaunPenh"/>
+        <a:font script="Knda" typeface="Tunga"/>
+        <a:font script="Guru" typeface="Raavi"/>
+        <a:font script="Cans" typeface="Euphemia"/>
+        <a:font script="Cher" typeface="Plantagenet Cherokee"/>
+        <a:font script="Yiii" typeface="Microsoft Yi Baiti"/>
+        <a:font script="Tibt" typeface="Microsoft Himalaya"/>
+        <a:font script="Thaa" typeface="MV Boli"/>
+        <a:font script="Deva" typeface="Mangal"/>
+        <a:font script="Telu" typeface="Gautami"/>
+        <a:font script="Taml" typeface="Latha"/>
+        <a:font script="Syrc" typeface="Estrangelo Edessa"/>
+        <a:font script="Orya" typeface="Kalinga"/>
+        <a:font script="Mlym" typeface="Kartika"/>
+        <a:font script="Laoo" typeface="DokChampa"/>
+        <a:font script="Sinh" typeface="Iskoola Pota"/>
+        <a:font script="Mong" typeface="Mongolian Baiti"/>
+        <a:font script="Viet" typeface="Arial"/>
+        <a:font script="Uigh" typeface="Microsoft Uighur"/>
+        <a:font script="Geor" typeface="Sylfaen"/>
+      </a:minorFont>
+    </a:fontScheme>
+    <a:fmtScheme name="Office">
+      <a:fillStyleLst>
+        <a:solidFill>
+          <a:schemeClr val="phClr"/>
+        </a:solidFill>
+        <a:gradFill rotWithShape="1">
+          <a:gsLst>
+            <a:gs pos="0">
+              <a:schemeClr val="phClr">
+                <a:tint val="50000"/>
+                <a:satMod val="300000"/>
+              </a:schemeClr>
+            </a:gs>
+            <a:gs pos="35000">
+              <a:schemeClr val="phClr">
+                <a:tint val="37000"/>
+                <a:satMod val="300000"/>
+              </a:schemeClr>
+            </a:gs>
+            <a:gs pos="100000">
+              <a:schemeClr val="phClr">
+                <a:tint val="15000"/>
+                <a:satMod val="350000"/>
+              </a:schemeClr>
+            </a:gs>
+          </a:gsLst>
+          <a:lin ang="16200000" scaled="1"/>
+        </a:gradFill>
+        <a:gradFill rotWithShape="1">
+          <a:gsLst>
+            <a:gs pos="0">
+              <a:schemeClr val="phClr">
+                <a:tint val="100000"/>
+                <a:shade val="100000"/>
+                <a:satMod val="130000"/>
+              </a:schemeClr>
+            </a:gs>
+            <a:gs pos="100000">
+              <a:schemeClr val="phClr">
+                <a:tint val="50000"/>
+                <a:shade val="100000"/>
+                <a:satMod val="350000"/>
+              </a:schemeClr>
+            </a:gs>
+          </a:gsLst>
+          <a:lin ang="16200000" scaled="0"/>
+        </a:gradFill>
+      </a:fillStyleLst>
+      <a:lnStyleLst>
+        <a:ln w="9525" cap="flat" cmpd="sng" algn="ctr">
+          <a:solidFill>
+            <a:schemeClr val="phClr">
+              <a:shade val="95000"/>
+              <a:satMod val="105000"/>
+            </a:schemeClr>
+          </a:solidFill>
+          <a:prstDash val="solid"/>
+        </a:ln>
+        <a:ln w="25400" cap="flat" cmpd="sng" algn="ctr">
+          <a:solidFill>
+            <a:schemeClr val="phClr"/>
+          </a:solidFill>
+          <a:prstDash val="solid"/>
+        </a:ln>
+        <a:ln w="38100" cap="flat" cmpd="sng" algn="ctr">
+          <a:solidFill>
+            <a:schemeClr val="phClr"/>
+          </a:solidFill>
+          <a:prstDash val="solid"/>
+        </a:ln>
+      </a:lnStyleLst>
+      <a:effectStyleLst>
+        <a:effectStyle>
+          <a:effectLst>
+            <a:outerShdw blurRad="40000" dist="20000" dir="5400000" rotWithShape="0">
+              <a:srgbClr val="000000">
+                <a:alpha val="38000"/>
+              </a:srgbClr>
+            </a:outerShdw>
+          </a:effectLst>
+        </a:effectStyle>
+        <a:effectStyle>
+          <a:effectLst>
+            <a:outerShdw blurRad="40000" dist="23000" dir="5400000" rotWithShape="0">
+              <a:srgbClr val="000000">
+                <a:alpha val="35000"/>
+              </a:srgbClr>
+            </a:outerShdw>
+          </a:effectLst>
+        </a:effectStyle>
+        <a:effectStyle>
+          <a:effectLst>
+            <a:outerShdw blurRad="40000" dist="23000" dir="5400000" rotWithShape="0">
+              <a:srgbClr val="000000">
+                <a:alpha val="35000"/>
+              </a:srgbClr>
+            </a:outerShdw>
+          </a:effectLst>
+          <a:scene3d>
+            <a:camera prst="orthographicFront">
+              <a:rot lat="0" lon="0" rev="0"/>
+            </a:camera>
+            <a:lightRig rig="threePt" dir="t">
+              <a:rot lat="0" lon="0" rev="1200000"/>
+            </a:lightRig>
+          </a:scene3d>
+          <a:sp3d>
+            <a:bevelT w="63500" h="25400"/>
+          </a:sp3d>
+        </a:effectStyle>
+      </a:effectStyleLst>
+      <a:bgFillStyleLst>
+        <a:solidFill>
+          <a:schemeClr val="phClr"/>
+        </a:solidFill>
+        <a:gradFill rotWithShape="1">
+          <a:gsLst>
+            <a:gs pos="0">
+              <a:schemeClr val="phClr">
+                <a:tint val="40000"/>
+                <a:satMod val="350000"/>
+              </a:schemeClr>
+            </a:gs>
+            <a:gs pos="40000">
+              <a:schemeClr val="phClr">
+                <a:tint val="45000"/>
+                <a:shade val="99000"/>
+                <a:satMod val="350000"/>
+              </a:schemeClr>
+            </a:gs>
+            <a:gs pos="100000">
+              <a:schemeClr val="phClr">
+                <a:shade val="20000"/>
+                <a:satMod val="255000"/>
+              </a:schemeClr>
+            </a:gs>
+          </a:gsLst>
+          <a:path path="circle">
+            <a:fillToRect l="50000" t="-80000" r="50000" b="180000"/>
+          </a:path>
+        </a:gradFill>
+        <a:gradFill rotWithShape="1">
+          <a:gsLst>
+            <a:gs pos="0">
+              <a:schemeClr val="phClr">
+                <a:tint val="80000"/>
+                <a:satMod val="300000"/>
+              </a:schemeClr>
+            </a:gs>
+            <a:gs pos="100000">
+              <a:schemeClr val="phClr">
+                <a:shade val="30000"/>
+                <a:satMod val="200000"/>
+              </a:schemeClr>
+            </a:gs>
+          </a:gsLst>
+          <a:path path="circle">
+            <a:fillToRect l="50000" t="50000" r="50000" b="50000"/>
+          </a:path>
+        </a:gradFill>
+      </a:bgFillStyleLst>
+    </a:fmtScheme>
+  </a:themeElements>
+</a:theme>
+</file>
+
+<file path=ppt/theme/theme2.xml><?xml version="1.0" encoding="utf-8"?>
 <a:theme xmlns:a="http://schemas.openxmlformats.org/drawingml/2006/main" xmlns:r="http://schemas.openxmlformats.org/officeDocument/2006/relationships">
   <a:themeElements>
     <a:clrScheme name="Default">
@@ -6223,283 +6663,4 @@
     </a:fmtScheme>
   </a:themeElements>
 </a:theme>
-</file>
-
-<file path=ppt/theme/theme2.xml><?xml version="1.0" encoding="utf-8"?>
-<a:theme xmlns:a="http://schemas.openxmlformats.org/drawingml/2006/main" xmlns:r="http://schemas.openxmlformats.org/officeDocument/2006/relationships" name="Simple Light">
-  <a:themeElements>
-    <a:clrScheme name="Simple Light">
-      <a:dk1>
-        <a:srgbClr val="000000"/>
-      </a:dk1>
-      <a:lt1>
-        <a:srgbClr val="FFFFFF"/>
-      </a:lt1>
-      <a:dk2>
-        <a:srgbClr val="595959"/>
-      </a:dk2>
-      <a:lt2>
-        <a:srgbClr val="EEEEEE"/>
-      </a:lt2>
-      <a:accent1>
-        <a:srgbClr val="4285F4"/>
-      </a:accent1>
-      <a:accent2>
-        <a:srgbClr val="212121"/>
-      </a:accent2>
-      <a:accent3>
-        <a:srgbClr val="78909C"/>
-      </a:accent3>
-      <a:accent4>
-        <a:srgbClr val="FFAB40"/>
-      </a:accent4>
-      <a:accent5>
-        <a:srgbClr val="0097A7"/>
-      </a:accent5>
-      <a:accent6>
-        <a:srgbClr val="EEFF41"/>
-      </a:accent6>
-      <a:hlink>
-        <a:srgbClr val="0097A7"/>
-      </a:hlink>
-      <a:folHlink>
-        <a:srgbClr val="0097A7"/>
-      </a:folHlink>
-    </a:clrScheme>
-    <a:fontScheme name="Office">
-      <a:majorFont>
-        <a:latin typeface="Arial"/>
-        <a:ea typeface=""/>
-        <a:cs typeface=""/>
-        <a:font script="Jpan" typeface="ＭＳ Ｐゴシック"/>
-        <a:font script="Hang" typeface="맑은 고딕"/>
-        <a:font script="Hans" typeface="宋体"/>
-        <a:font script="Hant" typeface="新細明體"/>
-        <a:font script="Arab" typeface="Times New Roman"/>
-        <a:font script="Hebr" typeface="Times New Roman"/>
-        <a:font script="Thai" typeface="Angsana New"/>
-        <a:font script="Ethi" typeface="Nyala"/>
-        <a:font script="Beng" typeface="Vrinda"/>
-        <a:font script="Gujr" typeface="Shruti"/>
-        <a:font script="Khmr" typeface="MoolBoran"/>
-        <a:font script="Knda" typeface="Tunga"/>
-        <a:font script="Guru" typeface="Raavi"/>
-        <a:font script="Cans" typeface="Euphemia"/>
-        <a:font script="Cher" typeface="Plantagenet Cherokee"/>
-        <a:font script="Yiii" typeface="Microsoft Yi Baiti"/>
-        <a:font script="Tibt" typeface="Microsoft Himalaya"/>
-        <a:font script="Thaa" typeface="MV Boli"/>
-        <a:font script="Deva" typeface="Mangal"/>
-        <a:font script="Telu" typeface="Gautami"/>
-        <a:font script="Taml" typeface="Latha"/>
-        <a:font script="Syrc" typeface="Estrangelo Edessa"/>
-        <a:font script="Orya" typeface="Kalinga"/>
-        <a:font script="Mlym" typeface="Kartika"/>
-        <a:font script="Laoo" typeface="DokChampa"/>
-        <a:font script="Sinh" typeface="Iskoola Pota"/>
-        <a:font script="Mong" typeface="Mongolian Baiti"/>
-        <a:font script="Viet" typeface="Times New Roman"/>
-        <a:font script="Uigh" typeface="Microsoft Uighur"/>
-        <a:font script="Geor" typeface="Sylfaen"/>
-      </a:majorFont>
-      <a:minorFont>
-        <a:latin typeface="Arial"/>
-        <a:ea typeface=""/>
-        <a:cs typeface=""/>
-        <a:font script="Jpan" typeface="ＭＳ Ｐゴシック"/>
-        <a:font script="Hang" typeface="맑은 고딕"/>
-        <a:font script="Hans" typeface="宋体"/>
-        <a:font script="Hant" typeface="新細明體"/>
-        <a:font script="Arab" typeface="Arial"/>
-        <a:font script="Hebr" typeface="Arial"/>
-        <a:font script="Thai" typeface="Cordia New"/>
-        <a:font script="Ethi" typeface="Nyala"/>
-        <a:font script="Beng" typeface="Vrinda"/>
-        <a:font script="Gujr" typeface="Shruti"/>
-        <a:font script="Khmr" typeface="DaunPenh"/>
-        <a:font script="Knda" typeface="Tunga"/>
-        <a:font script="Guru" typeface="Raavi"/>
-        <a:font script="Cans" typeface="Euphemia"/>
-        <a:font script="Cher" typeface="Plantagenet Cherokee"/>
-        <a:font script="Yiii" typeface="Microsoft Yi Baiti"/>
-        <a:font script="Tibt" typeface="Microsoft Himalaya"/>
-        <a:font script="Thaa" typeface="MV Boli"/>
-        <a:font script="Deva" typeface="Mangal"/>
-        <a:font script="Telu" typeface="Gautami"/>
-        <a:font script="Taml" typeface="Latha"/>
-        <a:font script="Syrc" typeface="Estrangelo Edessa"/>
-        <a:font script="Orya" typeface="Kalinga"/>
-        <a:font script="Mlym" typeface="Kartika"/>
-        <a:font script="Laoo" typeface="DokChampa"/>
-        <a:font script="Sinh" typeface="Iskoola Pota"/>
-        <a:font script="Mong" typeface="Mongolian Baiti"/>
-        <a:font script="Viet" typeface="Arial"/>
-        <a:font script="Uigh" typeface="Microsoft Uighur"/>
-        <a:font script="Geor" typeface="Sylfaen"/>
-      </a:minorFont>
-    </a:fontScheme>
-    <a:fmtScheme name="Office">
-      <a:fillStyleLst>
-        <a:solidFill>
-          <a:schemeClr val="phClr"/>
-        </a:solidFill>
-        <a:gradFill rotWithShape="1">
-          <a:gsLst>
-            <a:gs pos="0">
-              <a:schemeClr val="phClr">
-                <a:tint val="50000"/>
-                <a:satMod val="300000"/>
-              </a:schemeClr>
-            </a:gs>
-            <a:gs pos="35000">
-              <a:schemeClr val="phClr">
-                <a:tint val="37000"/>
-                <a:satMod val="300000"/>
-              </a:schemeClr>
-            </a:gs>
-            <a:gs pos="100000">
-              <a:schemeClr val="phClr">
-                <a:tint val="15000"/>
-                <a:satMod val="350000"/>
-              </a:schemeClr>
-            </a:gs>
-          </a:gsLst>
-          <a:lin ang="16200000" scaled="1"/>
-        </a:gradFill>
-        <a:gradFill rotWithShape="1">
-          <a:gsLst>
-            <a:gs pos="0">
-              <a:schemeClr val="phClr">
-                <a:tint val="100000"/>
-                <a:shade val="100000"/>
-                <a:satMod val="130000"/>
-              </a:schemeClr>
-            </a:gs>
-            <a:gs pos="100000">
-              <a:schemeClr val="phClr">
-                <a:tint val="50000"/>
-                <a:shade val="100000"/>
-                <a:satMod val="350000"/>
-              </a:schemeClr>
-            </a:gs>
-          </a:gsLst>
-          <a:lin ang="16200000" scaled="0"/>
-        </a:gradFill>
-      </a:fillStyleLst>
-      <a:lnStyleLst>
-        <a:ln w="9525" cap="flat" cmpd="sng" algn="ctr">
-          <a:solidFill>
-            <a:schemeClr val="phClr">
-              <a:shade val="95000"/>
-              <a:satMod val="105000"/>
-            </a:schemeClr>
-          </a:solidFill>
-          <a:prstDash val="solid"/>
-        </a:ln>
-        <a:ln w="25400" cap="flat" cmpd="sng" algn="ctr">
-          <a:solidFill>
-            <a:schemeClr val="phClr"/>
-          </a:solidFill>
-          <a:prstDash val="solid"/>
-        </a:ln>
-        <a:ln w="38100" cap="flat" cmpd="sng" algn="ctr">
-          <a:solidFill>
-            <a:schemeClr val="phClr"/>
-          </a:solidFill>
-          <a:prstDash val="solid"/>
-        </a:ln>
-      </a:lnStyleLst>
-      <a:effectStyleLst>
-        <a:effectStyle>
-          <a:effectLst>
-            <a:outerShdw blurRad="40000" dist="20000" dir="5400000" rotWithShape="0">
-              <a:srgbClr val="000000">
-                <a:alpha val="38000"/>
-              </a:srgbClr>
-            </a:outerShdw>
-          </a:effectLst>
-        </a:effectStyle>
-        <a:effectStyle>
-          <a:effectLst>
-            <a:outerShdw blurRad="40000" dist="23000" dir="5400000" rotWithShape="0">
-              <a:srgbClr val="000000">
-                <a:alpha val="35000"/>
-              </a:srgbClr>
-            </a:outerShdw>
-          </a:effectLst>
-        </a:effectStyle>
-        <a:effectStyle>
-          <a:effectLst>
-            <a:outerShdw blurRad="40000" dist="23000" dir="5400000" rotWithShape="0">
-              <a:srgbClr val="000000">
-                <a:alpha val="35000"/>
-              </a:srgbClr>
-            </a:outerShdw>
-          </a:effectLst>
-          <a:scene3d>
-            <a:camera prst="orthographicFront">
-              <a:rot lat="0" lon="0" rev="0"/>
-            </a:camera>
-            <a:lightRig rig="threePt" dir="t">
-              <a:rot lat="0" lon="0" rev="1200000"/>
-            </a:lightRig>
-          </a:scene3d>
-          <a:sp3d>
-            <a:bevelT w="63500" h="25400"/>
-          </a:sp3d>
-        </a:effectStyle>
-      </a:effectStyleLst>
-      <a:bgFillStyleLst>
-        <a:solidFill>
-          <a:schemeClr val="phClr"/>
-        </a:solidFill>
-        <a:gradFill rotWithShape="1">
-          <a:gsLst>
-            <a:gs pos="0">
-              <a:schemeClr val="phClr">
-                <a:tint val="40000"/>
-                <a:satMod val="350000"/>
-              </a:schemeClr>
-            </a:gs>
-            <a:gs pos="40000">
-              <a:schemeClr val="phClr">
-                <a:tint val="45000"/>
-                <a:shade val="99000"/>
-                <a:satMod val="350000"/>
-              </a:schemeClr>
-            </a:gs>
-            <a:gs pos="100000">
-              <a:schemeClr val="phClr">
-                <a:shade val="20000"/>
-                <a:satMod val="255000"/>
-              </a:schemeClr>
-            </a:gs>
-          </a:gsLst>
-          <a:path path="circle">
-            <a:fillToRect l="50000" t="-80000" r="50000" b="180000"/>
-          </a:path>
-        </a:gradFill>
-        <a:gradFill rotWithShape="1">
-          <a:gsLst>
-            <a:gs pos="0">
-              <a:schemeClr val="phClr">
-                <a:tint val="80000"/>
-                <a:satMod val="300000"/>
-              </a:schemeClr>
-            </a:gs>
-            <a:gs pos="100000">
-              <a:schemeClr val="phClr">
-                <a:shade val="30000"/>
-                <a:satMod val="200000"/>
-              </a:schemeClr>
-            </a:gs>
-          </a:gsLst>
-          <a:path path="circle">
-            <a:fillToRect l="50000" t="50000" r="50000" b="50000"/>
-          </a:path>
-        </a:gradFill>
-      </a:bgFillStyleLst>
-    </a:fmtScheme>
-  </a:themeElements>
-</a:theme>
 </file>